--- a/AFA2025BGK.pptx
+++ b/AFA2025BGK.pptx
@@ -222,7 +222,7 @@
           <a:p>
             <a:fld id="{847798E2-455A-DA4E-9A7B-87605B80F021}" type="datetimeFigureOut">
               <a:rPr lang="en-US" smtClean="0"/>
-              <a:t>1/2/25</a:t>
+              <a:t>1/3/25</a:t>
             </a:fld>
             <a:endParaRPr lang="en-US"/>
           </a:p>
@@ -6768,43 +6768,21 @@
                                   </p:childTnLst>
                                 </p:cTn>
                               </p:par>
-                            </p:childTnLst>
-                          </p:cTn>
-                        </p:par>
-                      </p:childTnLst>
-                    </p:cTn>
-                  </p:par>
-                  <p:par>
-                    <p:cTn id="11" fill="hold">
-                      <p:stCondLst>
-                        <p:cond delay="indefinite"/>
-                      </p:stCondLst>
-                      <p:childTnLst>
-                        <p:par>
-                          <p:cTn id="12" fill="hold">
-                            <p:stCondLst>
-                              <p:cond delay="0"/>
-                            </p:stCondLst>
-                            <p:childTnLst>
                               <p:par>
-                                <p:cTn id="13" presetID="1" presetClass="entr" presetSubtype="0" fill="hold" nodeType="clickEffect">
+                                <p:cTn id="11" presetID="1" presetClass="entr" presetSubtype="0" fill="hold" nodeType="withEffect">
                                   <p:stCondLst>
                                     <p:cond delay="0"/>
                                   </p:stCondLst>
                                   <p:childTnLst>
                                     <p:set>
                                       <p:cBhvr>
-                                        <p:cTn id="14" dur="1" fill="hold">
+                                        <p:cTn id="12" dur="1" fill="hold">
                                           <p:stCondLst>
                                             <p:cond delay="0"/>
                                           </p:stCondLst>
                                         </p:cTn>
                                         <p:tgtEl>
-                                          <p:spTgt spid="3">
-                                            <p:txEl>
-                                              <p:pRg st="8" end="8"/>
-                                            </p:txEl>
-                                          </p:spTgt>
+                                          <p:spTgt spid="5"/>
                                         </p:tgtEl>
                                         <p:attrNameLst>
                                           <p:attrName>style.visibility</p:attrName>
@@ -6817,8 +6795,26 @@
                                   </p:childTnLst>
                                 </p:cTn>
                               </p:par>
+                            </p:childTnLst>
+                          </p:cTn>
+                        </p:par>
+                      </p:childTnLst>
+                    </p:cTn>
+                  </p:par>
+                  <p:par>
+                    <p:cTn id="13" fill="hold">
+                      <p:stCondLst>
+                        <p:cond delay="indefinite"/>
+                      </p:stCondLst>
+                      <p:childTnLst>
+                        <p:par>
+                          <p:cTn id="14" fill="hold">
+                            <p:stCondLst>
+                              <p:cond delay="0"/>
+                            </p:stCondLst>
+                            <p:childTnLst>
                               <p:par>
-                                <p:cTn id="15" presetID="1" presetClass="entr" presetSubtype="0" fill="hold" nodeType="withEffect">
+                                <p:cTn id="15" presetID="1" presetClass="entr" presetSubtype="0" fill="hold" nodeType="clickEffect">
                                   <p:stCondLst>
                                     <p:cond delay="0"/>
                                   </p:stCondLst>
@@ -6833,7 +6829,7 @@
                                         <p:tgtEl>
                                           <p:spTgt spid="3">
                                             <p:txEl>
-                                              <p:pRg st="9" end="9"/>
+                                              <p:pRg st="8" end="8"/>
                                             </p:txEl>
                                           </p:spTgt>
                                         </p:tgtEl>
@@ -6864,7 +6860,7 @@
                                         <p:tgtEl>
                                           <p:spTgt spid="3">
                                             <p:txEl>
-                                              <p:pRg st="10" end="10"/>
+                                              <p:pRg st="9" end="9"/>
                                             </p:txEl>
                                           </p:spTgt>
                                         </p:tgtEl>
@@ -6893,7 +6889,11 @@
                                           </p:stCondLst>
                                         </p:cTn>
                                         <p:tgtEl>
-                                          <p:spTgt spid="5"/>
+                                          <p:spTgt spid="3">
+                                            <p:txEl>
+                                              <p:pRg st="10" end="10"/>
+                                            </p:txEl>
+                                          </p:spTgt>
                                         </p:tgtEl>
                                         <p:attrNameLst>
                                           <p:attrName>style.visibility</p:attrName>
@@ -7084,6 +7084,22 @@
                 <a:cs typeface="Arial" panose="020B0604020202020204" pitchFamily="34" charset="0"/>
               </a:rPr>
               <a:t>Which are salient?</a:t>
+            </a:r>
+          </a:p>
+          <a:p>
+            <a:pPr marL="571500" indent="-571500" algn="l">
+              <a:buFont typeface="Arial" panose="020B0604020202020204" pitchFamily="34" charset="0"/>
+              <a:buChar char="•"/>
+            </a:pPr>
+            <a:r>
+              <a:rPr lang="en-US" sz="4000" b="1" dirty="0">
+                <a:solidFill>
+                  <a:schemeClr val="tx1"/>
+                </a:solidFill>
+                <a:latin typeface="Arial" panose="020B0604020202020204" pitchFamily="34" charset="0"/>
+                <a:cs typeface="Arial" panose="020B0604020202020204" pitchFamily="34" charset="0"/>
+              </a:rPr>
+              <a:t>Which MCCs drive “non-reward” results?</a:t>
             </a:r>
           </a:p>
           <a:p>
@@ -7341,6 +7357,55 @@
                                           <p:spTgt spid="3">
                                             <p:txEl>
                                               <p:pRg st="4" end="4"/>
+                                            </p:txEl>
+                                          </p:spTgt>
+                                        </p:tgtEl>
+                                        <p:attrNameLst>
+                                          <p:attrName>style.visibility</p:attrName>
+                                        </p:attrNameLst>
+                                      </p:cBhvr>
+                                      <p:to>
+                                        <p:strVal val="visible"/>
+                                      </p:to>
+                                    </p:set>
+                                  </p:childTnLst>
+                                </p:cTn>
+                              </p:par>
+                            </p:childTnLst>
+                          </p:cTn>
+                        </p:par>
+                      </p:childTnLst>
+                    </p:cTn>
+                  </p:par>
+                  <p:par>
+                    <p:cTn id="19" fill="hold">
+                      <p:stCondLst>
+                        <p:cond delay="indefinite"/>
+                      </p:stCondLst>
+                      <p:childTnLst>
+                        <p:par>
+                          <p:cTn id="20" fill="hold">
+                            <p:stCondLst>
+                              <p:cond delay="0"/>
+                            </p:stCondLst>
+                            <p:childTnLst>
+                              <p:par>
+                                <p:cTn id="21" presetID="1" presetClass="entr" presetSubtype="0" fill="hold" grpId="0" nodeType="clickEffect">
+                                  <p:stCondLst>
+                                    <p:cond delay="0"/>
+                                  </p:stCondLst>
+                                  <p:childTnLst>
+                                    <p:set>
+                                      <p:cBhvr>
+                                        <p:cTn id="22" dur="1" fill="hold">
+                                          <p:stCondLst>
+                                            <p:cond delay="0"/>
+                                          </p:stCondLst>
+                                        </p:cTn>
+                                        <p:tgtEl>
+                                          <p:spTgt spid="3">
+                                            <p:txEl>
+                                              <p:pRg st="5" end="5"/>
                                             </p:txEl>
                                           </p:spTgt>
                                         </p:tgtEl>
